--- a/presentation/EE52037_Piku_Presentation.pptx
+++ b/presentation/EE52037_Piku_Presentation.pptx
@@ -4688,7 +4688,7 @@
                 </a:solidFill>
                 <a:latin typeface="Calibri"/>
               </a:rPr>
-              <a:t>Towards Simulation-to-Reality Transfer</a:t>
+              <a:t>A Physically Motivated Noise Model for</a:t>
             </a:r>
           </a:p>
           <a:p>
@@ -4707,7 +4707,7 @@
                 </a:solidFill>
                 <a:latin typeface="Calibri"/>
               </a:rPr>
-              <a:t>in EIT Tactile Sensing</a:t>
+              <a:t>Robust EIT Tactile Classification</a:t>
             </a:r>
           </a:p>
         </p:txBody>
@@ -4749,7 +4749,7 @@
                 </a:solidFill>
                 <a:latin typeface="Calibri"/>
               </a:rPr>
-              <a:t>A noise-augmented deep learning approach</a:t>
+              <a:t>Under simulated domain shift</a:t>
             </a:r>
           </a:p>
         </p:txBody>
